--- a/paperV1/figures/solution_concept_RshortCfewTlarge_24_ORACLE.pptx
+++ b/paperV1/figures/solution_concept_RshortCfewTlarge_24_ORACLE.pptx
@@ -209,7 +209,7 @@
           <a:p>
             <a:fld id="{881C93AA-6D13-44A9-BA1B-C14C591C13B3}" type="datetimeFigureOut">
               <a:rPr lang="en-US" smtClean="0"/>
-              <a:t>7/21/2026</a:t>
+              <a:t>8/17/2026</a:t>
             </a:fld>
             <a:endParaRPr lang="en-US"/>
           </a:p>
@@ -739,7 +739,7 @@
           <a:p>
             <a:fld id="{5BCAD085-E8A6-8845-BD4E-CB4CCA059FC4}" type="datetimeFigureOut">
               <a:rPr lang="en-US" smtClean="0"/>
-              <a:t>7/21/2026</a:t>
+              <a:t>8/17/2026</a:t>
             </a:fld>
             <a:endParaRPr lang="en-US"/>
           </a:p>
@@ -907,7 +907,7 @@
           <a:p>
             <a:fld id="{5BCAD085-E8A6-8845-BD4E-CB4CCA059FC4}" type="datetimeFigureOut">
               <a:rPr lang="en-US" smtClean="0"/>
-              <a:t>7/21/2026</a:t>
+              <a:t>8/17/2026</a:t>
             </a:fld>
             <a:endParaRPr lang="en-US"/>
           </a:p>
@@ -1085,7 +1085,7 @@
           <a:p>
             <a:fld id="{5BCAD085-E8A6-8845-BD4E-CB4CCA059FC4}" type="datetimeFigureOut">
               <a:rPr lang="en-US" smtClean="0"/>
-              <a:t>7/21/2026</a:t>
+              <a:t>8/17/2026</a:t>
             </a:fld>
             <a:endParaRPr lang="en-US"/>
           </a:p>
@@ -1253,7 +1253,7 @@
           <a:p>
             <a:fld id="{5BCAD085-E8A6-8845-BD4E-CB4CCA059FC4}" type="datetimeFigureOut">
               <a:rPr lang="en-US" smtClean="0"/>
-              <a:t>7/21/2026</a:t>
+              <a:t>8/17/2026</a:t>
             </a:fld>
             <a:endParaRPr lang="en-US"/>
           </a:p>
@@ -1498,7 +1498,7 @@
           <a:p>
             <a:fld id="{5BCAD085-E8A6-8845-BD4E-CB4CCA059FC4}" type="datetimeFigureOut">
               <a:rPr lang="en-US" smtClean="0"/>
-              <a:t>7/21/2026</a:t>
+              <a:t>8/17/2026</a:t>
             </a:fld>
             <a:endParaRPr lang="en-US"/>
           </a:p>
@@ -1783,7 +1783,7 @@
           <a:p>
             <a:fld id="{5BCAD085-E8A6-8845-BD4E-CB4CCA059FC4}" type="datetimeFigureOut">
               <a:rPr lang="en-US" smtClean="0"/>
-              <a:t>7/21/2026</a:t>
+              <a:t>8/17/2026</a:t>
             </a:fld>
             <a:endParaRPr lang="en-US"/>
           </a:p>
@@ -2202,7 +2202,7 @@
           <a:p>
             <a:fld id="{5BCAD085-E8A6-8845-BD4E-CB4CCA059FC4}" type="datetimeFigureOut">
               <a:rPr lang="en-US" smtClean="0"/>
-              <a:t>7/21/2026</a:t>
+              <a:t>8/17/2026</a:t>
             </a:fld>
             <a:endParaRPr lang="en-US"/>
           </a:p>
@@ -2319,7 +2319,7 @@
           <a:p>
             <a:fld id="{5BCAD085-E8A6-8845-BD4E-CB4CCA059FC4}" type="datetimeFigureOut">
               <a:rPr lang="en-US" smtClean="0"/>
-              <a:t>7/21/2026</a:t>
+              <a:t>8/17/2026</a:t>
             </a:fld>
             <a:endParaRPr lang="en-US"/>
           </a:p>
@@ -2414,7 +2414,7 @@
           <a:p>
             <a:fld id="{5BCAD085-E8A6-8845-BD4E-CB4CCA059FC4}" type="datetimeFigureOut">
               <a:rPr lang="en-US" smtClean="0"/>
-              <a:t>7/21/2026</a:t>
+              <a:t>8/17/2026</a:t>
             </a:fld>
             <a:endParaRPr lang="en-US"/>
           </a:p>
@@ -2689,7 +2689,7 @@
           <a:p>
             <a:fld id="{5BCAD085-E8A6-8845-BD4E-CB4CCA059FC4}" type="datetimeFigureOut">
               <a:rPr lang="en-US" smtClean="0"/>
-              <a:t>7/21/2026</a:t>
+              <a:t>8/17/2026</a:t>
             </a:fld>
             <a:endParaRPr lang="en-US"/>
           </a:p>
@@ -2941,7 +2941,7 @@
           <a:p>
             <a:fld id="{5BCAD085-E8A6-8845-BD4E-CB4CCA059FC4}" type="datetimeFigureOut">
               <a:rPr lang="en-US" smtClean="0"/>
-              <a:t>7/21/2026</a:t>
+              <a:t>8/17/2026</a:t>
             </a:fld>
             <a:endParaRPr lang="en-US"/>
           </a:p>
@@ -3152,7 +3152,7 @@
           <a:p>
             <a:fld id="{5BCAD085-E8A6-8845-BD4E-CB4CCA059FC4}" type="datetimeFigureOut">
               <a:rPr lang="en-US" smtClean="0"/>
-              <a:t>7/21/2026</a:t>
+              <a:t>8/17/2026</a:t>
             </a:fld>
             <a:endParaRPr lang="en-US"/>
           </a:p>
@@ -8348,59 +8348,6 @@
             </a:p>
           </p:txBody>
         </p:sp>
-        <p:sp>
-          <p:nvSpPr>
-            <p:cNvPr id="124" name="soc.frame"/>
-            <p:cNvSpPr/>
-            <p:nvPr/>
-          </p:nvSpPr>
-          <p:spPr>
-            <a:xfrm>
-              <a:off x="1076790" y="3383280"/>
-              <a:ext cx="10574866" cy="822960"/>
-            </a:xfrm>
-            <a:prstGeom prst="rect">
-              <a:avLst/>
-            </a:prstGeom>
-            <a:solidFill>
-              <a:srgbClr val="F2F2F2">
-                <a:alpha val="50196"/>
-              </a:srgbClr>
-            </a:solidFill>
-            <a:ln w="12700">
-              <a:solidFill>
-                <a:schemeClr val="tx1"/>
-              </a:solidFill>
-            </a:ln>
-            <a:effectLst/>
-          </p:spPr>
-          <p:style>
-            <a:lnRef idx="1">
-              <a:schemeClr val="accent1"/>
-            </a:lnRef>
-            <a:fillRef idx="3">
-              <a:schemeClr val="accent1"/>
-            </a:fillRef>
-            <a:effectRef idx="2">
-              <a:schemeClr val="accent1"/>
-            </a:effectRef>
-            <a:fontRef idx="minor">
-              <a:schemeClr val="lt1"/>
-            </a:fontRef>
-          </p:style>
-          <p:txBody>
-            <a:bodyPr rtlCol="0" anchor="ctr"/>
-            <a:lstStyle/>
-            <a:p>
-              <a:pPr algn="ctr"/>
-              <a:endParaRPr sz="2800" dirty="0">
-                <a:latin typeface="Calibri Light" panose="020F0302020204030204" pitchFamily="34" charset="0"/>
-                <a:ea typeface="Calibri Light" panose="020F0302020204030204" pitchFamily="34" charset="0"/>
-                <a:cs typeface="Calibri Light" panose="020F0302020204030204" pitchFamily="34" charset="0"/>
-              </a:endParaRPr>
-            </a:p>
-          </p:txBody>
-        </p:sp>
         <p:cxnSp>
           <p:nvCxnSpPr>
             <p:cNvPr id="125" name="soc.Ecap.line"/>
@@ -8928,6 +8875,55 @@
             </a:p>
           </p:txBody>
         </p:sp>
+        <p:sp>
+          <p:nvSpPr>
+            <p:cNvPr id="124" name="soc.frame"/>
+            <p:cNvSpPr/>
+            <p:nvPr/>
+          </p:nvSpPr>
+          <p:spPr>
+            <a:xfrm>
+              <a:off x="1076790" y="3383280"/>
+              <a:ext cx="10574866" cy="822960"/>
+            </a:xfrm>
+            <a:prstGeom prst="rect">
+              <a:avLst/>
+            </a:prstGeom>
+            <a:noFill/>
+            <a:ln w="28575">
+              <a:solidFill>
+                <a:schemeClr val="tx1"/>
+              </a:solidFill>
+            </a:ln>
+            <a:effectLst/>
+          </p:spPr>
+          <p:style>
+            <a:lnRef idx="1">
+              <a:schemeClr val="accent1"/>
+            </a:lnRef>
+            <a:fillRef idx="3">
+              <a:schemeClr val="accent1"/>
+            </a:fillRef>
+            <a:effectRef idx="2">
+              <a:schemeClr val="accent1"/>
+            </a:effectRef>
+            <a:fontRef idx="minor">
+              <a:schemeClr val="lt1"/>
+            </a:fontRef>
+          </p:style>
+          <p:txBody>
+            <a:bodyPr rtlCol="0" anchor="ctr"/>
+            <a:lstStyle/>
+            <a:p>
+              <a:pPr algn="ctr"/>
+              <a:endParaRPr sz="2800" dirty="0">
+                <a:latin typeface="Calibri Light" panose="020F0302020204030204" pitchFamily="34" charset="0"/>
+                <a:ea typeface="Calibri Light" panose="020F0302020204030204" pitchFamily="34" charset="0"/>
+                <a:cs typeface="Calibri Light" panose="020F0302020204030204" pitchFamily="34" charset="0"/>
+              </a:endParaRPr>
+            </a:p>
+          </p:txBody>
+        </p:sp>
       </p:grpSp>
       <p:grpSp>
         <p:nvGrpSpPr>
@@ -8981,59 +8977,6 @@
                 <a:solidFill>
                   <a:srgbClr val="222222"/>
                 </a:solidFill>
-                <a:latin typeface="Calibri Light" panose="020F0302020204030204" pitchFamily="34" charset="0"/>
-                <a:ea typeface="Calibri Light" panose="020F0302020204030204" pitchFamily="34" charset="0"/>
-                <a:cs typeface="Calibri Light" panose="020F0302020204030204" pitchFamily="34" charset="0"/>
-              </a:endParaRPr>
-            </a:p>
-          </p:txBody>
-        </p:sp>
-        <p:sp>
-          <p:nvSpPr>
-            <p:cNvPr id="139" name="hos.frame"/>
-            <p:cNvSpPr/>
-            <p:nvPr/>
-          </p:nvSpPr>
-          <p:spPr>
-            <a:xfrm>
-              <a:off x="1076790" y="4370832"/>
-              <a:ext cx="10574866" cy="768096"/>
-            </a:xfrm>
-            <a:prstGeom prst="rect">
-              <a:avLst/>
-            </a:prstGeom>
-            <a:solidFill>
-              <a:srgbClr val="F2F2F2">
-                <a:alpha val="50196"/>
-              </a:srgbClr>
-            </a:solidFill>
-            <a:ln w="12700">
-              <a:solidFill>
-                <a:schemeClr val="tx1"/>
-              </a:solidFill>
-            </a:ln>
-            <a:effectLst/>
-          </p:spPr>
-          <p:style>
-            <a:lnRef idx="1">
-              <a:schemeClr val="accent1"/>
-            </a:lnRef>
-            <a:fillRef idx="3">
-              <a:schemeClr val="accent1"/>
-            </a:fillRef>
-            <a:effectRef idx="2">
-              <a:schemeClr val="accent1"/>
-            </a:effectRef>
-            <a:fontRef idx="minor">
-              <a:schemeClr val="lt1"/>
-            </a:fontRef>
-          </p:style>
-          <p:txBody>
-            <a:bodyPr rtlCol="0" anchor="ctr"/>
-            <a:lstStyle/>
-            <a:p>
-              <a:pPr algn="ctr"/>
-              <a:endParaRPr sz="2800">
                 <a:latin typeface="Calibri Light" panose="020F0302020204030204" pitchFamily="34" charset="0"/>
                 <a:ea typeface="Calibri Light" panose="020F0302020204030204" pitchFamily="34" charset="0"/>
                 <a:cs typeface="Calibri Light" panose="020F0302020204030204" pitchFamily="34" charset="0"/>
@@ -10388,6 +10331,55 @@
             </a:p>
           </p:txBody>
         </p:sp>
+        <p:sp>
+          <p:nvSpPr>
+            <p:cNvPr id="139" name="hos.frame"/>
+            <p:cNvSpPr/>
+            <p:nvPr/>
+          </p:nvSpPr>
+          <p:spPr>
+            <a:xfrm>
+              <a:off x="1076790" y="4370832"/>
+              <a:ext cx="10574866" cy="768096"/>
+            </a:xfrm>
+            <a:prstGeom prst="rect">
+              <a:avLst/>
+            </a:prstGeom>
+            <a:noFill/>
+            <a:ln w="28575">
+              <a:solidFill>
+                <a:schemeClr val="tx1"/>
+              </a:solidFill>
+            </a:ln>
+            <a:effectLst/>
+          </p:spPr>
+          <p:style>
+            <a:lnRef idx="1">
+              <a:schemeClr val="accent1"/>
+            </a:lnRef>
+            <a:fillRef idx="3">
+              <a:schemeClr val="accent1"/>
+            </a:fillRef>
+            <a:effectRef idx="2">
+              <a:schemeClr val="accent1"/>
+            </a:effectRef>
+            <a:fontRef idx="minor">
+              <a:schemeClr val="lt1"/>
+            </a:fontRef>
+          </p:style>
+          <p:txBody>
+            <a:bodyPr rtlCol="0" anchor="ctr"/>
+            <a:lstStyle/>
+            <a:p>
+              <a:pPr algn="ctr"/>
+              <a:endParaRPr sz="2800">
+                <a:latin typeface="Calibri Light" panose="020F0302020204030204" pitchFamily="34" charset="0"/>
+                <a:ea typeface="Calibri Light" panose="020F0302020204030204" pitchFamily="34" charset="0"/>
+                <a:cs typeface="Calibri Light" panose="020F0302020204030204" pitchFamily="34" charset="0"/>
+              </a:endParaRPr>
+            </a:p>
+          </p:txBody>
+        </p:sp>
       </p:grpSp>
       <p:grpSp>
         <p:nvGrpSpPr>
@@ -11792,7 +11784,7 @@
         <p:spPr>
           <a:xfrm>
             <a:off x="2317787" y="2792577"/>
-            <a:ext cx="205861" cy="2936394"/>
+            <a:ext cx="205861" cy="376732"/>
           </a:xfrm>
           <a:prstGeom prst="rect">
             <a:avLst/>
@@ -11846,8 +11838,8 @@
         </p:nvSpPr>
         <p:spPr>
           <a:xfrm>
-            <a:off x="3996449" y="2792577"/>
-            <a:ext cx="211690" cy="2936392"/>
+            <a:off x="4002275" y="2792577"/>
+            <a:ext cx="205863" cy="376732"/>
           </a:xfrm>
           <a:prstGeom prst="rect">
             <a:avLst/>
@@ -11902,7 +11894,7 @@
         <p:spPr>
           <a:xfrm>
             <a:off x="4512430" y="2792576"/>
-            <a:ext cx="3911361" cy="2936392"/>
+            <a:ext cx="3911361" cy="376732"/>
           </a:xfrm>
           <a:prstGeom prst="rect">
             <a:avLst/>
@@ -11956,8 +11948,8 @@
         </p:nvSpPr>
         <p:spPr>
           <a:xfrm>
-            <a:off x="2783590" y="3169309"/>
-            <a:ext cx="428193" cy="2559659"/>
+            <a:off x="2783590" y="3274400"/>
+            <a:ext cx="428193" cy="1147253"/>
           </a:xfrm>
           <a:prstGeom prst="rect">
             <a:avLst/>
@@ -12011,8 +12003,8 @@
         </p:nvSpPr>
         <p:spPr>
           <a:xfrm>
-            <a:off x="8651153" y="3169308"/>
-            <a:ext cx="506203" cy="2559661"/>
+            <a:off x="8651153" y="3256503"/>
+            <a:ext cx="506203" cy="1178337"/>
           </a:xfrm>
           <a:prstGeom prst="rect">
             <a:avLst/>
@@ -12066,8 +12058,8 @@
         </p:nvSpPr>
         <p:spPr>
           <a:xfrm>
-            <a:off x="10361353" y="3169309"/>
-            <a:ext cx="350648" cy="2559660"/>
+            <a:off x="10361353" y="3261213"/>
+            <a:ext cx="350648" cy="1173627"/>
           </a:xfrm>
           <a:prstGeom prst="rect">
             <a:avLst/>
@@ -12130,7 +12122,7 @@
           </a:xfrm>
           <a:prstGeom prst="curvedConnector3">
             <a:avLst>
-              <a:gd name="adj1" fmla="val 7576"/>
+              <a:gd name="adj1" fmla="val 50000"/>
             </a:avLst>
           </a:prstGeom>
           <a:ln w="38100">
@@ -12174,8 +12166,8 @@
         </p:nvCxnSpPr>
         <p:spPr>
           <a:xfrm rot="5400000">
-            <a:off x="4713135" y="1538112"/>
-            <a:ext cx="643624" cy="1865306"/>
+            <a:off x="4714592" y="1539569"/>
+            <a:ext cx="643624" cy="1862393"/>
           </a:xfrm>
           <a:prstGeom prst="curvedConnector3">
             <a:avLst/>
@@ -12400,10 +12392,10 @@
         </p:nvGrpSpPr>
         <p:grpSpPr>
           <a:xfrm>
-            <a:off x="2581779" y="2301486"/>
-            <a:ext cx="8889709" cy="491091"/>
-            <a:chOff x="2670543" y="2317340"/>
-            <a:chExt cx="8889709" cy="491091"/>
+            <a:off x="2602633" y="2301486"/>
+            <a:ext cx="8868855" cy="491091"/>
+            <a:chOff x="2691397" y="2317340"/>
+            <a:chExt cx="8868855" cy="491091"/>
           </a:xfrm>
         </p:grpSpPr>
         <p:sp>
@@ -12693,7 +12685,7 @@
           </p:nvSpPr>
           <p:spPr>
             <a:xfrm>
-              <a:off x="2670543" y="2505456"/>
+              <a:off x="2691397" y="2582400"/>
               <a:ext cx="326051" cy="184666"/>
             </a:xfrm>
             <a:prstGeom prst="rect">
@@ -12764,8 +12756,8 @@
           </p:nvCxnSpPr>
           <p:spPr>
             <a:xfrm>
-              <a:off x="2833569" y="2690122"/>
-              <a:ext cx="65644" cy="118309"/>
+              <a:off x="2854423" y="2767066"/>
+              <a:ext cx="44790" cy="41365"/>
             </a:xfrm>
             <a:prstGeom prst="line">
               <a:avLst/>
@@ -12988,6 +12980,501 @@
           </p:style>
         </p:cxnSp>
       </p:grpSp>
+      <p:sp>
+        <p:nvSpPr>
+          <p:cNvPr id="4" name="Rectangle 3">
+            <a:extLst>
+              <a:ext uri="{FF2B5EF4-FFF2-40B4-BE49-F238E27FC236}">
+                <a16:creationId xmlns:a16="http://schemas.microsoft.com/office/drawing/2014/main" id="{AC381206-0E5F-1147-228B-38AEA7CF09ED}"/>
+              </a:ext>
+            </a:extLst>
+          </p:cNvPr>
+          <p:cNvSpPr/>
+          <p:nvPr/>
+        </p:nvSpPr>
+        <p:spPr>
+          <a:xfrm>
+            <a:off x="2317787" y="3261213"/>
+            <a:ext cx="205861" cy="1160440"/>
+          </a:xfrm>
+          <a:prstGeom prst="rect">
+            <a:avLst/>
+          </a:prstGeom>
+          <a:solidFill>
+            <a:srgbClr val="872971">
+              <a:alpha val="5098"/>
+            </a:srgbClr>
+          </a:solidFill>
+          <a:ln>
+            <a:solidFill>
+              <a:srgbClr val="872971"/>
+            </a:solidFill>
+          </a:ln>
+          <a:effectLst/>
+        </p:spPr>
+        <p:style>
+          <a:lnRef idx="1">
+            <a:schemeClr val="accent1"/>
+          </a:lnRef>
+          <a:fillRef idx="3">
+            <a:schemeClr val="accent1"/>
+          </a:fillRef>
+          <a:effectRef idx="2">
+            <a:schemeClr val="accent1"/>
+          </a:effectRef>
+          <a:fontRef idx="minor">
+            <a:schemeClr val="lt1"/>
+          </a:fontRef>
+        </p:style>
+        <p:txBody>
+          <a:bodyPr rtlCol="0" anchor="ctr"/>
+          <a:lstStyle/>
+          <a:p>
+            <a:pPr algn="ctr"/>
+            <a:endParaRPr lang="en-US"/>
+          </a:p>
+        </p:txBody>
+      </p:sp>
+      <p:sp>
+        <p:nvSpPr>
+          <p:cNvPr id="83" name="Rectangle 82">
+            <a:extLst>
+              <a:ext uri="{FF2B5EF4-FFF2-40B4-BE49-F238E27FC236}">
+                <a16:creationId xmlns:a16="http://schemas.microsoft.com/office/drawing/2014/main" id="{028A5E7F-EA04-0AD5-A955-157480935027}"/>
+              </a:ext>
+            </a:extLst>
+          </p:cNvPr>
+          <p:cNvSpPr/>
+          <p:nvPr/>
+        </p:nvSpPr>
+        <p:spPr>
+          <a:xfrm>
+            <a:off x="2317787" y="4555282"/>
+            <a:ext cx="205861" cy="864663"/>
+          </a:xfrm>
+          <a:prstGeom prst="rect">
+            <a:avLst/>
+          </a:prstGeom>
+          <a:solidFill>
+            <a:srgbClr val="872971">
+              <a:alpha val="5098"/>
+            </a:srgbClr>
+          </a:solidFill>
+          <a:ln>
+            <a:solidFill>
+              <a:srgbClr val="872971"/>
+            </a:solidFill>
+          </a:ln>
+          <a:effectLst/>
+        </p:spPr>
+        <p:style>
+          <a:lnRef idx="1">
+            <a:schemeClr val="accent1"/>
+          </a:lnRef>
+          <a:fillRef idx="3">
+            <a:schemeClr val="accent1"/>
+          </a:fillRef>
+          <a:effectRef idx="2">
+            <a:schemeClr val="accent1"/>
+          </a:effectRef>
+          <a:fontRef idx="minor">
+            <a:schemeClr val="lt1"/>
+          </a:fontRef>
+        </p:style>
+        <p:txBody>
+          <a:bodyPr rtlCol="0" anchor="ctr"/>
+          <a:lstStyle/>
+          <a:p>
+            <a:pPr algn="ctr"/>
+            <a:endParaRPr lang="en-US"/>
+          </a:p>
+        </p:txBody>
+      </p:sp>
+      <p:sp>
+        <p:nvSpPr>
+          <p:cNvPr id="98" name="Rectangle 97">
+            <a:extLst>
+              <a:ext uri="{FF2B5EF4-FFF2-40B4-BE49-F238E27FC236}">
+                <a16:creationId xmlns:a16="http://schemas.microsoft.com/office/drawing/2014/main" id="{5E41B454-5486-711A-D7DD-C457EC9C4B61}"/>
+              </a:ext>
+            </a:extLst>
+          </p:cNvPr>
+          <p:cNvSpPr/>
+          <p:nvPr/>
+        </p:nvSpPr>
+        <p:spPr>
+          <a:xfrm>
+            <a:off x="2783590" y="4555282"/>
+            <a:ext cx="428193" cy="864662"/>
+          </a:xfrm>
+          <a:prstGeom prst="rect">
+            <a:avLst/>
+          </a:prstGeom>
+          <a:solidFill>
+            <a:srgbClr val="436C3C">
+              <a:alpha val="14902"/>
+            </a:srgbClr>
+          </a:solidFill>
+          <a:ln>
+            <a:solidFill>
+              <a:srgbClr val="436C3C"/>
+            </a:solidFill>
+          </a:ln>
+          <a:effectLst/>
+        </p:spPr>
+        <p:style>
+          <a:lnRef idx="1">
+            <a:schemeClr val="accent1"/>
+          </a:lnRef>
+          <a:fillRef idx="3">
+            <a:schemeClr val="accent1"/>
+          </a:fillRef>
+          <a:effectRef idx="2">
+            <a:schemeClr val="accent1"/>
+          </a:effectRef>
+          <a:fontRef idx="minor">
+            <a:schemeClr val="lt1"/>
+          </a:fontRef>
+        </p:style>
+        <p:txBody>
+          <a:bodyPr rtlCol="0" anchor="ctr"/>
+          <a:lstStyle/>
+          <a:p>
+            <a:pPr algn="ctr"/>
+            <a:endParaRPr lang="en-US" dirty="0"/>
+          </a:p>
+        </p:txBody>
+      </p:sp>
+      <p:sp>
+        <p:nvSpPr>
+          <p:cNvPr id="133" name="Rectangle 132">
+            <a:extLst>
+              <a:ext uri="{FF2B5EF4-FFF2-40B4-BE49-F238E27FC236}">
+                <a16:creationId xmlns:a16="http://schemas.microsoft.com/office/drawing/2014/main" id="{4DB618EE-6D05-3AB0-C334-BB7D943458EF}"/>
+              </a:ext>
+            </a:extLst>
+          </p:cNvPr>
+          <p:cNvSpPr/>
+          <p:nvPr/>
+        </p:nvSpPr>
+        <p:spPr>
+          <a:xfrm>
+            <a:off x="3996449" y="3256503"/>
+            <a:ext cx="211690" cy="1165149"/>
+          </a:xfrm>
+          <a:prstGeom prst="rect">
+            <a:avLst/>
+          </a:prstGeom>
+          <a:solidFill>
+            <a:srgbClr val="872971">
+              <a:alpha val="5098"/>
+            </a:srgbClr>
+          </a:solidFill>
+          <a:ln>
+            <a:solidFill>
+              <a:srgbClr val="872971"/>
+            </a:solidFill>
+          </a:ln>
+          <a:effectLst/>
+        </p:spPr>
+        <p:style>
+          <a:lnRef idx="1">
+            <a:schemeClr val="accent1"/>
+          </a:lnRef>
+          <a:fillRef idx="3">
+            <a:schemeClr val="accent1"/>
+          </a:fillRef>
+          <a:effectRef idx="2">
+            <a:schemeClr val="accent1"/>
+          </a:effectRef>
+          <a:fontRef idx="minor">
+            <a:schemeClr val="lt1"/>
+          </a:fontRef>
+        </p:style>
+        <p:txBody>
+          <a:bodyPr rtlCol="0" anchor="ctr"/>
+          <a:lstStyle/>
+          <a:p>
+            <a:pPr algn="ctr"/>
+            <a:endParaRPr lang="en-US"/>
+          </a:p>
+        </p:txBody>
+      </p:sp>
+      <p:sp>
+        <p:nvSpPr>
+          <p:cNvPr id="136" name="Rectangle 135">
+            <a:extLst>
+              <a:ext uri="{FF2B5EF4-FFF2-40B4-BE49-F238E27FC236}">
+                <a16:creationId xmlns:a16="http://schemas.microsoft.com/office/drawing/2014/main" id="{D7AAFFEF-4862-95CC-DE69-9C4F07304371}"/>
+              </a:ext>
+            </a:extLst>
+          </p:cNvPr>
+          <p:cNvSpPr/>
+          <p:nvPr/>
+        </p:nvSpPr>
+        <p:spPr>
+          <a:xfrm>
+            <a:off x="4002277" y="4538472"/>
+            <a:ext cx="211690" cy="881471"/>
+          </a:xfrm>
+          <a:prstGeom prst="rect">
+            <a:avLst/>
+          </a:prstGeom>
+          <a:solidFill>
+            <a:srgbClr val="872971">
+              <a:alpha val="5098"/>
+            </a:srgbClr>
+          </a:solidFill>
+          <a:ln>
+            <a:solidFill>
+              <a:srgbClr val="872971"/>
+            </a:solidFill>
+          </a:ln>
+          <a:effectLst/>
+        </p:spPr>
+        <p:style>
+          <a:lnRef idx="1">
+            <a:schemeClr val="accent1"/>
+          </a:lnRef>
+          <a:fillRef idx="3">
+            <a:schemeClr val="accent1"/>
+          </a:fillRef>
+          <a:effectRef idx="2">
+            <a:schemeClr val="accent1"/>
+          </a:effectRef>
+          <a:fontRef idx="minor">
+            <a:schemeClr val="lt1"/>
+          </a:fontRef>
+        </p:style>
+        <p:txBody>
+          <a:bodyPr rtlCol="0" anchor="ctr"/>
+          <a:lstStyle/>
+          <a:p>
+            <a:pPr algn="ctr"/>
+            <a:endParaRPr lang="en-US"/>
+          </a:p>
+        </p:txBody>
+      </p:sp>
+      <p:sp>
+        <p:nvSpPr>
+          <p:cNvPr id="147" name="Rectangle 146">
+            <a:extLst>
+              <a:ext uri="{FF2B5EF4-FFF2-40B4-BE49-F238E27FC236}">
+                <a16:creationId xmlns:a16="http://schemas.microsoft.com/office/drawing/2014/main" id="{7BE7BF6A-33CD-F0B0-9BB1-AF2C0DBEC7BE}"/>
+              </a:ext>
+            </a:extLst>
+          </p:cNvPr>
+          <p:cNvSpPr/>
+          <p:nvPr/>
+        </p:nvSpPr>
+        <p:spPr>
+          <a:xfrm>
+            <a:off x="4512430" y="3272898"/>
+            <a:ext cx="3911361" cy="1148754"/>
+          </a:xfrm>
+          <a:prstGeom prst="rect">
+            <a:avLst/>
+          </a:prstGeom>
+          <a:solidFill>
+            <a:srgbClr val="872971">
+              <a:alpha val="5098"/>
+            </a:srgbClr>
+          </a:solidFill>
+          <a:ln>
+            <a:solidFill>
+              <a:srgbClr val="872971"/>
+            </a:solidFill>
+          </a:ln>
+          <a:effectLst/>
+        </p:spPr>
+        <p:style>
+          <a:lnRef idx="1">
+            <a:schemeClr val="accent1"/>
+          </a:lnRef>
+          <a:fillRef idx="3">
+            <a:schemeClr val="accent1"/>
+          </a:fillRef>
+          <a:effectRef idx="2">
+            <a:schemeClr val="accent1"/>
+          </a:effectRef>
+          <a:fontRef idx="minor">
+            <a:schemeClr val="lt1"/>
+          </a:fontRef>
+        </p:style>
+        <p:txBody>
+          <a:bodyPr rtlCol="0" anchor="ctr"/>
+          <a:lstStyle/>
+          <a:p>
+            <a:pPr algn="ctr"/>
+            <a:endParaRPr lang="en-US"/>
+          </a:p>
+        </p:txBody>
+      </p:sp>
+      <p:sp>
+        <p:nvSpPr>
+          <p:cNvPr id="158" name="Rectangle 157">
+            <a:extLst>
+              <a:ext uri="{FF2B5EF4-FFF2-40B4-BE49-F238E27FC236}">
+                <a16:creationId xmlns:a16="http://schemas.microsoft.com/office/drawing/2014/main" id="{1EE36D5A-38EB-583F-01E4-D85D9E7BC94A}"/>
+              </a:ext>
+            </a:extLst>
+          </p:cNvPr>
+          <p:cNvSpPr/>
+          <p:nvPr/>
+        </p:nvSpPr>
+        <p:spPr>
+          <a:xfrm>
+            <a:off x="4512430" y="4555281"/>
+            <a:ext cx="3911361" cy="864662"/>
+          </a:xfrm>
+          <a:prstGeom prst="rect">
+            <a:avLst/>
+          </a:prstGeom>
+          <a:solidFill>
+            <a:srgbClr val="872971">
+              <a:alpha val="5098"/>
+            </a:srgbClr>
+          </a:solidFill>
+          <a:ln>
+            <a:solidFill>
+              <a:srgbClr val="872971"/>
+            </a:solidFill>
+          </a:ln>
+          <a:effectLst/>
+        </p:spPr>
+        <p:style>
+          <a:lnRef idx="1">
+            <a:schemeClr val="accent1"/>
+          </a:lnRef>
+          <a:fillRef idx="3">
+            <a:schemeClr val="accent1"/>
+          </a:fillRef>
+          <a:effectRef idx="2">
+            <a:schemeClr val="accent1"/>
+          </a:effectRef>
+          <a:fontRef idx="minor">
+            <a:schemeClr val="lt1"/>
+          </a:fontRef>
+        </p:style>
+        <p:txBody>
+          <a:bodyPr rtlCol="0" anchor="ctr"/>
+          <a:lstStyle/>
+          <a:p>
+            <a:pPr algn="ctr"/>
+            <a:endParaRPr lang="en-US"/>
+          </a:p>
+        </p:txBody>
+      </p:sp>
+      <p:sp>
+        <p:nvSpPr>
+          <p:cNvPr id="164" name="Rectangle 163">
+            <a:extLst>
+              <a:ext uri="{FF2B5EF4-FFF2-40B4-BE49-F238E27FC236}">
+                <a16:creationId xmlns:a16="http://schemas.microsoft.com/office/drawing/2014/main" id="{6BC910BA-FAE5-0E4F-BE0E-A2E2432A66FB}"/>
+              </a:ext>
+            </a:extLst>
+          </p:cNvPr>
+          <p:cNvSpPr/>
+          <p:nvPr/>
+        </p:nvSpPr>
+        <p:spPr>
+          <a:xfrm>
+            <a:off x="8658929" y="4555282"/>
+            <a:ext cx="506203" cy="881471"/>
+          </a:xfrm>
+          <a:prstGeom prst="rect">
+            <a:avLst/>
+          </a:prstGeom>
+          <a:solidFill>
+            <a:srgbClr val="436C3C">
+              <a:alpha val="14902"/>
+            </a:srgbClr>
+          </a:solidFill>
+          <a:ln>
+            <a:solidFill>
+              <a:srgbClr val="436C3C"/>
+            </a:solidFill>
+          </a:ln>
+          <a:effectLst/>
+        </p:spPr>
+        <p:style>
+          <a:lnRef idx="1">
+            <a:schemeClr val="accent1"/>
+          </a:lnRef>
+          <a:fillRef idx="3">
+            <a:schemeClr val="accent1"/>
+          </a:fillRef>
+          <a:effectRef idx="2">
+            <a:schemeClr val="accent1"/>
+          </a:effectRef>
+          <a:fontRef idx="minor">
+            <a:schemeClr val="lt1"/>
+          </a:fontRef>
+        </p:style>
+        <p:txBody>
+          <a:bodyPr rtlCol="0" anchor="ctr"/>
+          <a:lstStyle/>
+          <a:p>
+            <a:pPr algn="ctr"/>
+            <a:endParaRPr lang="en-US"/>
+          </a:p>
+        </p:txBody>
+      </p:sp>
+      <p:sp>
+        <p:nvSpPr>
+          <p:cNvPr id="170" name="Rectangle 169">
+            <a:extLst>
+              <a:ext uri="{FF2B5EF4-FFF2-40B4-BE49-F238E27FC236}">
+                <a16:creationId xmlns:a16="http://schemas.microsoft.com/office/drawing/2014/main" id="{A889361E-4A0F-85A9-3961-AD3C899C675A}"/>
+              </a:ext>
+            </a:extLst>
+          </p:cNvPr>
+          <p:cNvSpPr/>
+          <p:nvPr/>
+        </p:nvSpPr>
+        <p:spPr>
+          <a:xfrm>
+            <a:off x="10369129" y="4538472"/>
+            <a:ext cx="350648" cy="881471"/>
+          </a:xfrm>
+          <a:prstGeom prst="rect">
+            <a:avLst/>
+          </a:prstGeom>
+          <a:solidFill>
+            <a:srgbClr val="436C3C">
+              <a:alpha val="14902"/>
+            </a:srgbClr>
+          </a:solidFill>
+          <a:ln>
+            <a:solidFill>
+              <a:srgbClr val="436C3C"/>
+            </a:solidFill>
+          </a:ln>
+          <a:effectLst/>
+        </p:spPr>
+        <p:style>
+          <a:lnRef idx="1">
+            <a:schemeClr val="accent1"/>
+          </a:lnRef>
+          <a:fillRef idx="3">
+            <a:schemeClr val="accent1"/>
+          </a:fillRef>
+          <a:effectRef idx="2">
+            <a:schemeClr val="accent1"/>
+          </a:effectRef>
+          <a:fontRef idx="minor">
+            <a:schemeClr val="lt1"/>
+          </a:fontRef>
+        </p:style>
+        <p:txBody>
+          <a:bodyPr rtlCol="0" anchor="ctr"/>
+          <a:lstStyle/>
+          <a:p>
+            <a:pPr algn="ctr"/>
+            <a:endParaRPr lang="en-US"/>
+          </a:p>
+        </p:txBody>
+      </p:sp>
     </p:spTree>
   </p:cSld>
   <p:clrMapOvr>
